--- a/Reporte 290926.pptx
+++ b/Reporte 290926.pptx
@@ -5,7 +5,7 @@
     <p:sldMasterId id="2147483672" r:id="rId1"/>
   </p:sldMasterIdLst>
   <p:notesMasterIdLst>
-    <p:notesMasterId r:id="rId20"/>
+    <p:notesMasterId r:id="rId19"/>
   </p:notesMasterIdLst>
   <p:sldIdLst>
     <p:sldId id="350" r:id="rId2"/>
@@ -23,24 +23,23 @@
     <p:sldId id="361" r:id="rId14"/>
     <p:sldId id="412" r:id="rId15"/>
     <p:sldId id="371" r:id="rId16"/>
-    <p:sldId id="417" r:id="rId17"/>
-    <p:sldId id="413" r:id="rId18"/>
-    <p:sldId id="280" r:id="rId19"/>
+    <p:sldId id="413" r:id="rId17"/>
+    <p:sldId id="280" r:id="rId18"/>
   </p:sldIdLst>
   <p:sldSz cx="9144000" cy="5143500" type="screen16x9"/>
   <p:notesSz cx="6858000" cy="9144000"/>
   <p:embeddedFontLst>
     <p:embeddedFont>
       <p:font typeface="Montserrat" panose="00000500000000000000" pitchFamily="2" charset="0"/>
-      <p:regular r:id="rId21"/>
-      <p:bold r:id="rId22"/>
-      <p:italic r:id="rId23"/>
-      <p:boldItalic r:id="rId24"/>
+      <p:regular r:id="rId20"/>
+      <p:bold r:id="rId21"/>
+      <p:italic r:id="rId22"/>
+      <p:boldItalic r:id="rId23"/>
     </p:embeddedFont>
     <p:embeddedFont>
       <p:font typeface="Montserrat Black" panose="00000A00000000000000" pitchFamily="2" charset="0"/>
-      <p:bold r:id="rId25"/>
-      <p:boldItalic r:id="rId26"/>
+      <p:bold r:id="rId24"/>
+      <p:boldItalic r:id="rId25"/>
     </p:embeddedFont>
   </p:embeddedFontLst>
   <p:defaultTextStyle>
@@ -6778,10 +6777,10 @@
       </p:sp>
       <p:pic>
         <p:nvPicPr>
-          <p:cNvPr id="4" name="Imagen 3">
+          <p:cNvPr id="5" name="Imagen 4">
             <a:extLst>
               <a:ext uri="{FF2B5EF4-FFF2-40B4-BE49-F238E27FC236}">
-                <a16:creationId xmlns:a16="http://schemas.microsoft.com/office/drawing/2014/main" id="{D95CA728-7EEF-EFE3-F188-1B54C4122B6F}"/>
+                <a16:creationId xmlns:a16="http://schemas.microsoft.com/office/drawing/2014/main" id="{C44015ED-9FF0-69D3-D863-FF85BDA13B81}"/>
               </a:ext>
             </a:extLst>
           </p:cNvPr>
@@ -6798,8 +6797,8 @@
         </p:blipFill>
         <p:spPr>
           <a:xfrm>
-            <a:off x="0" y="731586"/>
-            <a:ext cx="9144000" cy="3823204"/>
+            <a:off x="-6725" y="503594"/>
+            <a:ext cx="9144000" cy="4279187"/>
           </a:xfrm>
           <a:prstGeom prst="rect">
             <a:avLst/>
@@ -6884,10 +6883,10 @@
       </p:sp>
       <p:pic>
         <p:nvPicPr>
-          <p:cNvPr id="4" name="Imagen 3">
+          <p:cNvPr id="3" name="Imagen 2">
             <a:extLst>
               <a:ext uri="{FF2B5EF4-FFF2-40B4-BE49-F238E27FC236}">
-                <a16:creationId xmlns:a16="http://schemas.microsoft.com/office/drawing/2014/main" id="{946DBE27-9E25-68FB-7CAD-0CBC6617B614}"/>
+                <a16:creationId xmlns:a16="http://schemas.microsoft.com/office/drawing/2014/main" id="{96BBBDC0-5EC4-EFC5-AFD7-7E5BBD7EEE2C}"/>
               </a:ext>
             </a:extLst>
           </p:cNvPr>
@@ -6904,8 +6903,8 @@
         </p:blipFill>
         <p:spPr>
           <a:xfrm>
-            <a:off x="0" y="1144715"/>
-            <a:ext cx="9144000" cy="2996945"/>
+            <a:off x="0" y="996655"/>
+            <a:ext cx="9144000" cy="3293065"/>
           </a:xfrm>
           <a:prstGeom prst="rect">
             <a:avLst/>
@@ -6990,10 +6989,10 @@
       </p:sp>
       <p:pic>
         <p:nvPicPr>
-          <p:cNvPr id="7" name="Imagen 6">
+          <p:cNvPr id="4" name="Imagen 3">
             <a:extLst>
               <a:ext uri="{FF2B5EF4-FFF2-40B4-BE49-F238E27FC236}">
-                <a16:creationId xmlns:a16="http://schemas.microsoft.com/office/drawing/2014/main" id="{E7B3C36F-4FA9-0BFC-A742-8F580D046F9D}"/>
+                <a16:creationId xmlns:a16="http://schemas.microsoft.com/office/drawing/2014/main" id="{607AB1C5-8C4C-EDCC-AA5C-B6D9583323BF}"/>
               </a:ext>
             </a:extLst>
           </p:cNvPr>
@@ -7010,8 +7009,8 @@
         </p:blipFill>
         <p:spPr>
           <a:xfrm>
-            <a:off x="0" y="858209"/>
-            <a:ext cx="9144000" cy="3569958"/>
+            <a:off x="0" y="369332"/>
+            <a:ext cx="9144000" cy="4656479"/>
           </a:xfrm>
           <a:prstGeom prst="rect">
             <a:avLst/>
@@ -7096,10 +7095,10 @@
       </p:sp>
       <p:pic>
         <p:nvPicPr>
-          <p:cNvPr id="4" name="Imagen 3">
+          <p:cNvPr id="3" name="Imagen 2">
             <a:extLst>
               <a:ext uri="{FF2B5EF4-FFF2-40B4-BE49-F238E27FC236}">
-                <a16:creationId xmlns:a16="http://schemas.microsoft.com/office/drawing/2014/main" id="{DC473597-7677-780A-8B9F-0E74A2A18706}"/>
+                <a16:creationId xmlns:a16="http://schemas.microsoft.com/office/drawing/2014/main" id="{4F5660C9-4FB0-AFD4-123C-EF3D3D8C0A8E}"/>
               </a:ext>
             </a:extLst>
           </p:cNvPr>
@@ -7116,8 +7115,8 @@
         </p:blipFill>
         <p:spPr>
           <a:xfrm>
-            <a:off x="-6725" y="1162440"/>
-            <a:ext cx="9144000" cy="2961496"/>
+            <a:off x="0" y="975964"/>
+            <a:ext cx="9144000" cy="3334447"/>
           </a:xfrm>
           <a:prstGeom prst="rect">
             <a:avLst/>
@@ -7202,10 +7201,10 @@
       </p:sp>
       <p:pic>
         <p:nvPicPr>
-          <p:cNvPr id="4" name="Imagen 3">
+          <p:cNvPr id="3" name="Imagen 2">
             <a:extLst>
               <a:ext uri="{FF2B5EF4-FFF2-40B4-BE49-F238E27FC236}">
-                <a16:creationId xmlns:a16="http://schemas.microsoft.com/office/drawing/2014/main" id="{A196FBCC-FB0C-5BCE-9E71-E6F405B65F9D}"/>
+                <a16:creationId xmlns:a16="http://schemas.microsoft.com/office/drawing/2014/main" id="{9B1D7A8E-4F2F-3F79-1A40-A10E762A36EB}"/>
               </a:ext>
             </a:extLst>
           </p:cNvPr>
@@ -7222,8 +7221,8 @@
         </p:blipFill>
         <p:spPr>
           <a:xfrm>
-            <a:off x="0" y="458022"/>
-            <a:ext cx="9144000" cy="4370332"/>
+            <a:off x="-1" y="1306286"/>
+            <a:ext cx="9144000" cy="2673804"/>
           </a:xfrm>
           <a:prstGeom prst="rect">
             <a:avLst/>
@@ -7244,118 +7243,6 @@
 </file>
 
 <file path=ppt/slides/slide16.xml><?xml version="1.0" encoding="utf-8"?>
-<p:sld xmlns:a="http://schemas.openxmlformats.org/drawingml/2006/main" xmlns:r="http://schemas.openxmlformats.org/officeDocument/2006/relationships" xmlns:p="http://schemas.openxmlformats.org/presentationml/2006/main">
-  <p:cSld>
-    <p:bg>
-      <p:bgPr>
-        <a:solidFill>
-          <a:srgbClr val="F8F9FA"/>
-        </a:solidFill>
-        <a:effectLst/>
-      </p:bgPr>
-    </p:bg>
-    <p:spTree>
-      <p:nvGrpSpPr>
-        <p:cNvPr id="1" name="">
-          <a:extLst>
-            <a:ext uri="{FF2B5EF4-FFF2-40B4-BE49-F238E27FC236}">
-              <a16:creationId xmlns:a16="http://schemas.microsoft.com/office/drawing/2014/main" id="{7ECC40E7-80C0-6C16-184F-47AF493FB996}"/>
-            </a:ext>
-          </a:extLst>
-        </p:cNvPr>
-        <p:cNvGrpSpPr/>
-        <p:nvPr/>
-      </p:nvGrpSpPr>
-      <p:grpSpPr>
-        <a:xfrm>
-          <a:off x="0" y="0"/>
-          <a:ext cx="0" cy="0"/>
-          <a:chOff x="0" y="0"/>
-          <a:chExt cx="0" cy="0"/>
-        </a:xfrm>
-      </p:grpSpPr>
-      <p:sp>
-        <p:nvSpPr>
-          <p:cNvPr id="6" name="CuadroTexto 5">
-            <a:extLst>
-              <a:ext uri="{FF2B5EF4-FFF2-40B4-BE49-F238E27FC236}">
-                <a16:creationId xmlns:a16="http://schemas.microsoft.com/office/drawing/2014/main" id="{1AFF4944-4FE3-CFE7-8E7A-E3A40F327A2B}"/>
-              </a:ext>
-            </a:extLst>
-          </p:cNvPr>
-          <p:cNvSpPr txBox="1"/>
-          <p:nvPr/>
-        </p:nvSpPr>
-        <p:spPr>
-          <a:xfrm>
-            <a:off x="1926166" y="88135"/>
-            <a:ext cx="5291667" cy="307777"/>
-          </a:xfrm>
-          <a:prstGeom prst="rect">
-            <a:avLst/>
-          </a:prstGeom>
-          <a:noFill/>
-        </p:spPr>
-        <p:txBody>
-          <a:bodyPr wrap="square" rtlCol="0">
-            <a:spAutoFit/>
-          </a:bodyPr>
-          <a:lstStyle/>
-          <a:p>
-            <a:pPr algn="ctr"/>
-            <a:r>
-              <a:rPr lang="es-MX" b="1" dirty="0">
-                <a:latin typeface="Montserrat" pitchFamily="2" charset="0"/>
-              </a:rPr>
-              <a:t>Temas de gobierno por radiodifusora</a:t>
-            </a:r>
-          </a:p>
-        </p:txBody>
-      </p:sp>
-      <p:pic>
-        <p:nvPicPr>
-          <p:cNvPr id="2" name="Imagen 1">
-            <a:extLst>
-              <a:ext uri="{FF2B5EF4-FFF2-40B4-BE49-F238E27FC236}">
-                <a16:creationId xmlns:a16="http://schemas.microsoft.com/office/drawing/2014/main" id="{3AFEB91A-398A-6097-5502-0BE4FD44DBA8}"/>
-              </a:ext>
-            </a:extLst>
-          </p:cNvPr>
-          <p:cNvPicPr>
-            <a:picLocks noChangeAspect="1"/>
-          </p:cNvPicPr>
-          <p:nvPr/>
-        </p:nvPicPr>
-        <p:blipFill>
-          <a:blip r:embed="rId2"/>
-          <a:stretch>
-            <a:fillRect/>
-          </a:stretch>
-        </p:blipFill>
-        <p:spPr>
-          <a:xfrm>
-            <a:off x="2000250" y="860662"/>
-            <a:ext cx="5143500" cy="3419475"/>
-          </a:xfrm>
-          <a:prstGeom prst="rect">
-            <a:avLst/>
-          </a:prstGeom>
-        </p:spPr>
-      </p:pic>
-    </p:spTree>
-    <p:extLst>
-      <p:ext uri="{BB962C8B-B14F-4D97-AF65-F5344CB8AC3E}">
-        <p14:creationId xmlns:p14="http://schemas.microsoft.com/office/powerpoint/2010/main" val="4113080273"/>
-      </p:ext>
-    </p:extLst>
-  </p:cSld>
-  <p:clrMapOvr>
-    <a:masterClrMapping/>
-  </p:clrMapOvr>
-</p:sld>
-</file>
-
-<file path=ppt/slides/slide17.xml><?xml version="1.0" encoding="utf-8"?>
 <p:sld xmlns:a="http://schemas.openxmlformats.org/drawingml/2006/main" xmlns:r="http://schemas.openxmlformats.org/officeDocument/2006/relationships" xmlns:p="http://schemas.openxmlformats.org/presentationml/2006/main">
   <p:cSld>
     <p:bg>
@@ -7424,36 +7311,44 @@
           </a:p>
         </p:txBody>
       </p:sp>
-      <p:pic>
-        <p:nvPicPr>
-          <p:cNvPr id="4" name="Imagen 3">
+      <p:sp>
+        <p:nvSpPr>
+          <p:cNvPr id="2" name="CuadroTexto 1">
             <a:extLst>
               <a:ext uri="{FF2B5EF4-FFF2-40B4-BE49-F238E27FC236}">
-                <a16:creationId xmlns:a16="http://schemas.microsoft.com/office/drawing/2014/main" id="{67EBD4EC-93EF-4119-710B-3458C07EAF1C}"/>
+                <a16:creationId xmlns:a16="http://schemas.microsoft.com/office/drawing/2014/main" id="{751DF6AD-7CBD-3342-1190-7459867D619F}"/>
               </a:ext>
             </a:extLst>
           </p:cNvPr>
-          <p:cNvPicPr>
-            <a:picLocks noChangeAspect="1"/>
-          </p:cNvPicPr>
+          <p:cNvSpPr txBox="1"/>
           <p:nvPr/>
-        </p:nvPicPr>
-        <p:blipFill>
-          <a:blip r:embed="rId2"/>
-          <a:stretch>
-            <a:fillRect/>
-          </a:stretch>
-        </p:blipFill>
+        </p:nvSpPr>
         <p:spPr>
           <a:xfrm>
-            <a:off x="0" y="1047750"/>
-            <a:ext cx="9144000" cy="3048000"/>
+            <a:off x="820799" y="2166134"/>
+            <a:ext cx="7502400" cy="954107"/>
           </a:xfrm>
           <a:prstGeom prst="rect">
             <a:avLst/>
           </a:prstGeom>
+          <a:noFill/>
         </p:spPr>
-      </p:pic>
+        <p:txBody>
+          <a:bodyPr wrap="square" rtlCol="0">
+            <a:spAutoFit/>
+          </a:bodyPr>
+          <a:lstStyle/>
+          <a:p>
+            <a:pPr algn="ctr"/>
+            <a:r>
+              <a:rPr lang="es-MX" sz="2800" b="1" dirty="0">
+                <a:latin typeface="Montserrat" panose="00000500000000000000" pitchFamily="2" charset="0"/>
+              </a:rPr>
+              <a:t>No se registró información emitida por radioescuchas</a:t>
+            </a:r>
+          </a:p>
+        </p:txBody>
+      </p:sp>
     </p:spTree>
     <p:extLst>
       <p:ext uri="{BB962C8B-B14F-4D97-AF65-F5344CB8AC3E}">
@@ -7467,7 +7362,7 @@
 </p:sld>
 </file>
 
-<file path=ppt/slides/slide18.xml><?xml version="1.0" encoding="utf-8"?>
+<file path=ppt/slides/slide17.xml><?xml version="1.0" encoding="utf-8"?>
 <p:sld xmlns:a="http://schemas.openxmlformats.org/drawingml/2006/main" xmlns:r="http://schemas.openxmlformats.org/officeDocument/2006/relationships" xmlns:p="http://schemas.openxmlformats.org/presentationml/2006/main">
   <p:cSld>
     <p:spTree>
